--- a/effect-tests/style-library-v1/samples/style-sample-editorial-magazine.pptx
+++ b/effect-tests/style-library-v1/samples/style-sample-editorial-magazine.pptx
@@ -902,26 +902,52 @@
           </a:ln>
         </p:spPr>
       </p:sp>
-      <p:sp>
-        <p:nvSpPr>
-          <p:cNvPr id="3" name="Shape 1"/>
-          <p:cNvSpPr/>
-          <p:nvPr/>
-        </p:nvSpPr>
+      <p:pic>
+        <p:nvPicPr>
+          <p:cNvPr id="3" name="Image 0" descr="/Users/dw/Desktop/codex-visual-ppt-deck-builder/effect-tests/style-library-v1/assets/background-editorial-magazine.png">    </p:cNvPr>
+          <p:cNvPicPr>
+            <a:picLocks noChangeAspect="1"/>
+          </p:cNvPicPr>
+          <p:nvPr/>
+        </p:nvPicPr>
+        <p:blipFill>
+          <a:blip r:embed="rId1"/>
+          <a:stretch>
+            <a:fillRect/>
+          </a:stretch>
+        </p:blipFill>
         <p:spPr>
           <a:xfrm>
             <a:off x="0" y="0"/>
-            <a:ext cx="82296" cy="6858000"/>
-          </a:xfrm>
-          <a:prstGeom prst="rect">
-            <a:avLst/>
-          </a:prstGeom>
-          <a:solidFill>
-            <a:srgbClr val="111827"/>
+            <a:ext cx="12191695" cy="6858000"/>
+          </a:xfrm>
+          <a:prstGeom prst="rect">
+            <a:avLst/>
+          </a:prstGeom>
+        </p:spPr>
+      </p:pic>
+      <p:sp>
+        <p:nvSpPr>
+          <p:cNvPr id="4" name="Shape 1"/>
+          <p:cNvSpPr/>
+          <p:nvPr/>
+        </p:nvSpPr>
+        <p:spPr>
+          <a:xfrm>
+            <a:off x="0" y="0"/>
+            <a:ext cx="12191695" cy="6858000"/>
+          </a:xfrm>
+          <a:prstGeom prst="rect">
+            <a:avLst/>
+          </a:prstGeom>
+          <a:solidFill>
+            <a:srgbClr val="FFFFFF">
+              <a:alpha val="82000"/>
+            </a:srgbClr>
           </a:solidFill>
           <a:ln w="12700">
             <a:solidFill>
-              <a:srgbClr val="111827">
+              <a:srgbClr val="333333">
                 <a:alpha val="0"/>
               </a:srgbClr>
             </a:solidFill>
@@ -931,14 +957,14 @@
       </p:sp>
       <p:sp>
         <p:nvSpPr>
-          <p:cNvPr id="4" name="Text 2"/>
-          <p:cNvSpPr/>
-          <p:nvPr/>
-        </p:nvSpPr>
-        <p:spPr>
-          <a:xfrm>
-            <a:off x="676656" y="438912"/>
-            <a:ext cx="2011680" cy="164592"/>
+          <p:cNvPr id="5" name="Text 2"/>
+          <p:cNvSpPr/>
+          <p:nvPr/>
+        </p:nvSpPr>
+        <p:spPr>
+          <a:xfrm>
+            <a:off x="5248656" y="5358384"/>
+            <a:ext cx="731520" cy="256032"/>
           </a:xfrm>
           <a:prstGeom prst="rect">
             <a:avLst/>
@@ -956,30 +982,30 @@
               <a:buNone/>
             </a:pPr>
             <a:r>
-              <a:rPr lang="en-US" sz="750" b="1" dirty="0">
+              <a:rPr lang="en-US" sz="1350" b="1" dirty="0">
                 <a:solidFill>
-                  <a:srgbClr val="111827"/>
+                  <a:srgbClr val="D8CFC6"/>
                 </a:solidFill>
-                <a:latin typeface="PingFang SC" pitchFamily="34" charset="0"/>
-                <a:ea typeface="PingFang SC" pitchFamily="34" charset="-122"/>
-                <a:cs typeface="PingFang SC" pitchFamily="34" charset="-120"/>
+                <a:latin typeface="Avenir Next" pitchFamily="34" charset="0"/>
+                <a:ea typeface="Avenir Next" pitchFamily="34" charset="-122"/>
+                <a:cs typeface="Avenir Next" pitchFamily="34" charset="-120"/>
               </a:rPr>
-              <a:t>2026 RESEARCH</a:t>
-            </a:r>
-            <a:endParaRPr lang="en-US" sz="750" dirty="0"/>
-          </a:p>
-        </p:txBody>
-      </p:sp>
-      <p:sp>
-        <p:nvSpPr>
-          <p:cNvPr id="5" name="Text 3"/>
-          <p:cNvSpPr/>
-          <p:nvPr/>
-        </p:nvSpPr>
-        <p:spPr>
-          <a:xfrm>
-            <a:off x="676656" y="713232"/>
-            <a:ext cx="5349240" cy="777240"/>
+              <a:t>01</a:t>
+            </a:r>
+            <a:endParaRPr lang="en-US" sz="1350" dirty="0"/>
+          </a:p>
+        </p:txBody>
+      </p:sp>
+      <p:sp>
+        <p:nvSpPr>
+          <p:cNvPr id="6" name="Text 3"/>
+          <p:cNvSpPr/>
+          <p:nvPr/>
+        </p:nvSpPr>
+        <p:spPr>
+          <a:xfrm>
+            <a:off x="804672" y="384048"/>
+            <a:ext cx="2468880" cy="164592"/>
           </a:xfrm>
           <a:prstGeom prst="rect">
             <a:avLst/>
@@ -997,30 +1023,30 @@
               <a:buNone/>
             </a:pPr>
             <a:r>
-              <a:rPr lang="en-US" sz="2600" b="1" dirty="0">
+              <a:rPr lang="en-US" sz="720" b="1" dirty="0">
                 <a:solidFill>
                   <a:srgbClr val="111827"/>
                 </a:solidFill>
-                <a:latin typeface="PingFang SC" pitchFamily="34" charset="0"/>
-                <a:ea typeface="PingFang SC" pitchFamily="34" charset="-122"/>
-                <a:cs typeface="PingFang SC" pitchFamily="34" charset="-120"/>
+                <a:latin typeface="Avenir Next" pitchFamily="34" charset="0"/>
+                <a:ea typeface="Avenir Next" pitchFamily="34" charset="-122"/>
+                <a:cs typeface="Avenir Next" pitchFamily="34" charset="-120"/>
               </a:rPr>
-              <a:t>2026 AI 应用趋势调研</a:t>
-            </a:r>
-            <a:endParaRPr lang="en-US" sz="2600" dirty="0"/>
-          </a:p>
-        </p:txBody>
-      </p:sp>
-      <p:sp>
-        <p:nvSpPr>
-          <p:cNvPr id="6" name="Text 4"/>
-          <p:cNvSpPr/>
-          <p:nvPr/>
-        </p:nvSpPr>
-        <p:spPr>
-          <a:xfrm>
-            <a:off x="713232" y="1481328"/>
-            <a:ext cx="4114800" cy="228600"/>
+              <a:t>ISSUE 01</a:t>
+            </a:r>
+            <a:endParaRPr lang="en-US" sz="720" dirty="0"/>
+          </a:p>
+        </p:txBody>
+      </p:sp>
+      <p:sp>
+        <p:nvSpPr>
+          <p:cNvPr id="7" name="Text 4"/>
+          <p:cNvSpPr/>
+          <p:nvPr/>
+        </p:nvSpPr>
+        <p:spPr>
+          <a:xfrm>
+            <a:off x="804672" y="731520"/>
+            <a:ext cx="4572000" cy="914400"/>
           </a:xfrm>
           <a:prstGeom prst="rect">
             <a:avLst/>
@@ -1038,7 +1064,48 @@
               <a:buNone/>
             </a:pPr>
             <a:r>
-              <a:rPr lang="en-US" sz="1050" b="1" dirty="0">
+              <a:rPr lang="en-US" sz="2800" b="1" dirty="0">
+                <a:solidFill>
+                  <a:srgbClr val="111827"/>
+                </a:solidFill>
+                <a:latin typeface="Songti SC" pitchFamily="34" charset="0"/>
+                <a:ea typeface="Songti SC" pitchFamily="34" charset="-122"/>
+                <a:cs typeface="Songti SC" pitchFamily="34" charset="-120"/>
+              </a:rPr>
+              <a:t>2026 AI 应用趋势调研</a:t>
+            </a:r>
+            <a:endParaRPr lang="en-US" sz="2800" dirty="0"/>
+          </a:p>
+        </p:txBody>
+      </p:sp>
+      <p:sp>
+        <p:nvSpPr>
+          <p:cNvPr id="8" name="Text 5"/>
+          <p:cNvSpPr/>
+          <p:nvPr/>
+        </p:nvSpPr>
+        <p:spPr>
+          <a:xfrm>
+            <a:off x="822960" y="1682496"/>
+            <a:ext cx="3291840" cy="219456"/>
+          </a:xfrm>
+          <a:prstGeom prst="rect">
+            <a:avLst/>
+          </a:prstGeom>
+          <a:noFill/>
+          <a:ln/>
+        </p:spPr>
+        <p:txBody>
+          <a:bodyPr wrap="square" lIns="0" tIns="0" rIns="0" bIns="0" rtlCol="0" anchor="ctr">
+            <a:normAutofit/>
+          </a:bodyPr>
+          <a:lstStyle/>
+          <a:p>
+            <a:pPr algn="l" indent="0" marL="0">
+              <a:buNone/>
+            </a:pPr>
+            <a:r>
+              <a:rPr lang="en-US" sz="1020" b="1" dirty="0">
                 <a:solidFill>
                   <a:srgbClr val="111827"/>
                 </a:solidFill>
@@ -1048,20 +1115,20 @@
               </a:rPr>
               <a:t>趋势洞察报告样张</a:t>
             </a:r>
-            <a:endParaRPr lang="en-US" sz="1050" dirty="0"/>
-          </a:p>
-        </p:txBody>
-      </p:sp>
-      <p:sp>
-        <p:nvSpPr>
-          <p:cNvPr id="7" name="Shape 5"/>
-          <p:cNvSpPr/>
-          <p:nvPr/>
-        </p:nvSpPr>
-        <p:spPr>
-          <a:xfrm>
-            <a:off x="786384" y="2148840"/>
-            <a:ext cx="4251960" cy="0"/>
+            <a:endParaRPr lang="en-US" sz="1020" dirty="0"/>
+          </a:p>
+        </p:txBody>
+      </p:sp>
+      <p:sp>
+        <p:nvSpPr>
+          <p:cNvPr id="9" name="Shape 6"/>
+          <p:cNvSpPr/>
+          <p:nvPr/>
+        </p:nvSpPr>
+        <p:spPr>
+          <a:xfrm>
+            <a:off x="804672" y="1883664"/>
+            <a:ext cx="1170432" cy="0"/>
           </a:xfrm>
           <a:prstGeom prst="line">
             <a:avLst/>
@@ -1070,7 +1137,7 @@
           <a:ln w="15240">
             <a:solidFill>
               <a:srgbClr val="111827">
-                <a:alpha val="65000"/>
+                <a:alpha val="90000"/>
               </a:srgbClr>
             </a:solidFill>
             <a:prstDash val="solid"/>
@@ -1079,14 +1146,14 @@
       </p:sp>
       <p:sp>
         <p:nvSpPr>
-          <p:cNvPr id="8" name="Text 6"/>
-          <p:cNvSpPr/>
-          <p:nvPr/>
-        </p:nvSpPr>
-        <p:spPr>
-          <a:xfrm>
-            <a:off x="786384" y="2331720"/>
-            <a:ext cx="1645920" cy="256032"/>
+          <p:cNvPr id="10" name="Text 7"/>
+          <p:cNvSpPr/>
+          <p:nvPr/>
+        </p:nvSpPr>
+        <p:spPr>
+          <a:xfrm>
+            <a:off x="804672" y="2322576"/>
+            <a:ext cx="2011680" cy="256032"/>
           </a:xfrm>
           <a:prstGeom prst="rect">
             <a:avLst/>
@@ -1120,14 +1187,14 @@
       </p:sp>
       <p:sp>
         <p:nvSpPr>
-          <p:cNvPr id="9" name="Text 7"/>
-          <p:cNvSpPr/>
-          <p:nvPr/>
-        </p:nvSpPr>
-        <p:spPr>
-          <a:xfrm>
-            <a:off x="786384" y="2834640"/>
-            <a:ext cx="4434840" cy="603504"/>
+          <p:cNvPr id="11" name="Text 8"/>
+          <p:cNvSpPr/>
+          <p:nvPr/>
+        </p:nvSpPr>
+        <p:spPr>
+          <a:xfrm>
+            <a:off x="804672" y="2761488"/>
+            <a:ext cx="3657600" cy="640080"/>
           </a:xfrm>
           <a:prstGeom prst="rect">
             <a:avLst/>
@@ -1161,13 +1228,13 @@
       </p:sp>
       <p:sp>
         <p:nvSpPr>
-          <p:cNvPr id="10" name="Shape 8"/>
-          <p:cNvSpPr/>
-          <p:nvPr/>
-        </p:nvSpPr>
-        <p:spPr>
-          <a:xfrm>
-            <a:off x="804672" y="3630168"/>
+          <p:cNvPr id="12" name="Shape 9"/>
+          <p:cNvSpPr/>
+          <p:nvPr/>
+        </p:nvSpPr>
+        <p:spPr>
+          <a:xfrm>
+            <a:off x="822960" y="3602736"/>
             <a:ext cx="73152" cy="73152"/>
           </a:xfrm>
           <a:prstGeom prst="ellipse">
@@ -1188,14 +1255,14 @@
       </p:sp>
       <p:sp>
         <p:nvSpPr>
-          <p:cNvPr id="11" name="Text 9"/>
-          <p:cNvSpPr/>
-          <p:nvPr/>
-        </p:nvSpPr>
-        <p:spPr>
-          <a:xfrm>
-            <a:off x="969264" y="3575304"/>
-            <a:ext cx="3977640" cy="164592"/>
+          <p:cNvPr id="13" name="Text 10"/>
+          <p:cNvSpPr/>
+          <p:nvPr/>
+        </p:nvSpPr>
+        <p:spPr>
+          <a:xfrm>
+            <a:off x="987552" y="3547872"/>
+            <a:ext cx="3474720" cy="164592"/>
           </a:xfrm>
           <a:prstGeom prst="rect">
             <a:avLst/>
@@ -1229,13 +1296,13 @@
       </p:sp>
       <p:sp>
         <p:nvSpPr>
-          <p:cNvPr id="12" name="Shape 10"/>
-          <p:cNvSpPr/>
-          <p:nvPr/>
-        </p:nvSpPr>
-        <p:spPr>
-          <a:xfrm>
-            <a:off x="804672" y="3922776"/>
+          <p:cNvPr id="14" name="Shape 11"/>
+          <p:cNvSpPr/>
+          <p:nvPr/>
+        </p:nvSpPr>
+        <p:spPr>
+          <a:xfrm>
+            <a:off x="822960" y="3895344"/>
             <a:ext cx="73152" cy="73152"/>
           </a:xfrm>
           <a:prstGeom prst="ellipse">
@@ -1256,14 +1323,14 @@
       </p:sp>
       <p:sp>
         <p:nvSpPr>
-          <p:cNvPr id="13" name="Text 11"/>
-          <p:cNvSpPr/>
-          <p:nvPr/>
-        </p:nvSpPr>
-        <p:spPr>
-          <a:xfrm>
-            <a:off x="969264" y="3867912"/>
-            <a:ext cx="3977640" cy="164592"/>
+          <p:cNvPr id="15" name="Text 12"/>
+          <p:cNvSpPr/>
+          <p:nvPr/>
+        </p:nvSpPr>
+        <p:spPr>
+          <a:xfrm>
+            <a:off x="987552" y="3840480"/>
+            <a:ext cx="3474720" cy="164592"/>
           </a:xfrm>
           <a:prstGeom prst="rect">
             <a:avLst/>
@@ -1297,13 +1364,13 @@
       </p:sp>
       <p:sp>
         <p:nvSpPr>
-          <p:cNvPr id="14" name="Shape 12"/>
-          <p:cNvSpPr/>
-          <p:nvPr/>
-        </p:nvSpPr>
-        <p:spPr>
-          <a:xfrm>
-            <a:off x="804672" y="4215384"/>
+          <p:cNvPr id="16" name="Shape 13"/>
+          <p:cNvSpPr/>
+          <p:nvPr/>
+        </p:nvSpPr>
+        <p:spPr>
+          <a:xfrm>
+            <a:off x="822960" y="4187952"/>
             <a:ext cx="73152" cy="73152"/>
           </a:xfrm>
           <a:prstGeom prst="ellipse">
@@ -1324,14 +1391,14 @@
       </p:sp>
       <p:sp>
         <p:nvSpPr>
-          <p:cNvPr id="15" name="Text 13"/>
-          <p:cNvSpPr/>
-          <p:nvPr/>
-        </p:nvSpPr>
-        <p:spPr>
-          <a:xfrm>
-            <a:off x="969264" y="4160520"/>
-            <a:ext cx="3977640" cy="164592"/>
+          <p:cNvPr id="17" name="Text 14"/>
+          <p:cNvSpPr/>
+          <p:nvPr/>
+        </p:nvSpPr>
+        <p:spPr>
+          <a:xfrm>
+            <a:off x="987552" y="4133088"/>
+            <a:ext cx="3474720" cy="164592"/>
           </a:xfrm>
           <a:prstGeom prst="rect">
             <a:avLst/>
@@ -1365,23 +1432,64 @@
       </p:sp>
       <p:sp>
         <p:nvSpPr>
-          <p:cNvPr id="16" name="Shape 14"/>
-          <p:cNvSpPr/>
-          <p:nvPr/>
-        </p:nvSpPr>
-        <p:spPr>
-          <a:xfrm>
-            <a:off x="822960" y="4956048"/>
-            <a:ext cx="530352" cy="0"/>
+          <p:cNvPr id="18" name="Text 15"/>
+          <p:cNvSpPr/>
+          <p:nvPr/>
+        </p:nvSpPr>
+        <p:spPr>
+          <a:xfrm>
+            <a:off x="822960" y="4974336"/>
+            <a:ext cx="1426464" cy="164592"/>
+          </a:xfrm>
+          <a:prstGeom prst="rect">
+            <a:avLst/>
+          </a:prstGeom>
+          <a:noFill/>
+          <a:ln/>
+        </p:spPr>
+        <p:txBody>
+          <a:bodyPr wrap="square" lIns="0" tIns="0" rIns="0" bIns="0" rtlCol="0" anchor="ctr">
+            <a:normAutofit/>
+          </a:bodyPr>
+          <a:lstStyle/>
+          <a:p>
+            <a:pPr algn="l" indent="0" marL="0">
+              <a:buNone/>
+            </a:pPr>
+            <a:r>
+              <a:rPr lang="en-US" sz="680" b="1" dirty="0">
+                <a:solidFill>
+                  <a:srgbClr val="5D6673"/>
+                </a:solidFill>
+                <a:latin typeface="Avenir Next" pitchFamily="34" charset="0"/>
+                <a:ea typeface="Avenir Next" pitchFamily="34" charset="-122"/>
+                <a:cs typeface="Avenir Next" pitchFamily="34" charset="-120"/>
+              </a:rPr>
+              <a:t>主叙事</a:t>
+            </a:r>
+            <a:endParaRPr lang="en-US" sz="680" dirty="0"/>
+          </a:p>
+        </p:txBody>
+      </p:sp>
+      <p:sp>
+        <p:nvSpPr>
+          <p:cNvPr id="19" name="Shape 16"/>
+          <p:cNvSpPr/>
+          <p:nvPr/>
+        </p:nvSpPr>
+        <p:spPr>
+          <a:xfrm>
+            <a:off x="822960" y="5212080"/>
+            <a:ext cx="512064" cy="0"/>
           </a:xfrm>
           <a:prstGeom prst="line">
             <a:avLst/>
           </a:prstGeom>
           <a:noFill/>
-          <a:ln w="25400">
+          <a:ln w="17780">
             <a:solidFill>
               <a:srgbClr val="111827">
-                <a:alpha val="78000"/>
+                <a:alpha val="84000"/>
               </a:srgbClr>
             </a:solidFill>
             <a:prstDash val="solid"/>
@@ -1390,14 +1498,14 @@
       </p:sp>
       <p:sp>
         <p:nvSpPr>
-          <p:cNvPr id="17" name="Text 15"/>
-          <p:cNvSpPr/>
-          <p:nvPr/>
-        </p:nvSpPr>
-        <p:spPr>
-          <a:xfrm>
-            <a:off x="822960" y="5084064"/>
-            <a:ext cx="1496568" cy="329184"/>
+          <p:cNvPr id="20" name="Text 17"/>
+          <p:cNvSpPr/>
+          <p:nvPr/>
+        </p:nvSpPr>
+        <p:spPr>
+          <a:xfrm>
+            <a:off x="822960" y="5266944"/>
+            <a:ext cx="1426464" cy="310896"/>
           </a:xfrm>
           <a:prstGeom prst="rect">
             <a:avLst/>
@@ -1419,9 +1527,9 @@
                 <a:solidFill>
                   <a:srgbClr val="111827"/>
                 </a:solidFill>
-                <a:latin typeface="PingFang SC" pitchFamily="34" charset="0"/>
-                <a:ea typeface="PingFang SC" pitchFamily="34" charset="-122"/>
-                <a:cs typeface="PingFang SC" pitchFamily="34" charset="-120"/>
+                <a:latin typeface="Songti SC" pitchFamily="34" charset="0"/>
+                <a:ea typeface="Songti SC" pitchFamily="34" charset="-122"/>
+                <a:cs typeface="Songti SC" pitchFamily="34" charset="-120"/>
               </a:rPr>
               <a:t>01</a:t>
             </a:r>
@@ -1431,14 +1539,14 @@
       </p:sp>
       <p:sp>
         <p:nvSpPr>
-          <p:cNvPr id="18" name="Text 16"/>
-          <p:cNvSpPr/>
-          <p:nvPr/>
-        </p:nvSpPr>
-        <p:spPr>
-          <a:xfrm>
-            <a:off x="822960" y="5449824"/>
-            <a:ext cx="1496568" cy="228600"/>
+          <p:cNvPr id="21" name="Text 18"/>
+          <p:cNvSpPr/>
+          <p:nvPr/>
+        </p:nvSpPr>
+        <p:spPr>
+          <a:xfrm>
+            <a:off x="2395728" y="4974336"/>
+            <a:ext cx="1426464" cy="164592"/>
           </a:xfrm>
           <a:prstGeom prst="rect">
             <a:avLst/>
@@ -1456,39 +1564,39 @@
               <a:buNone/>
             </a:pPr>
             <a:r>
-              <a:rPr lang="en-US" sz="720" b="1" dirty="0">
+              <a:rPr lang="en-US" sz="680" b="1" dirty="0">
                 <a:solidFill>
-                  <a:srgbClr val="111827"/>
+                  <a:srgbClr val="5D6673"/>
                 </a:solidFill>
-                <a:latin typeface="PingFang SC" pitchFamily="34" charset="0"/>
-                <a:ea typeface="PingFang SC" pitchFamily="34" charset="-122"/>
-                <a:cs typeface="PingFang SC" pitchFamily="34" charset="-120"/>
+                <a:latin typeface="Avenir Next" pitchFamily="34" charset="0"/>
+                <a:ea typeface="Avenir Next" pitchFamily="34" charset="-122"/>
+                <a:cs typeface="Avenir Next" pitchFamily="34" charset="-120"/>
               </a:rPr>
-              <a:t>主叙事</a:t>
-            </a:r>
-            <a:endParaRPr lang="en-US" sz="720" dirty="0"/>
-          </a:p>
-        </p:txBody>
-      </p:sp>
-      <p:sp>
-        <p:nvSpPr>
-          <p:cNvPr id="19" name="Shape 17"/>
-          <p:cNvSpPr/>
-          <p:nvPr/>
-        </p:nvSpPr>
-        <p:spPr>
-          <a:xfrm>
-            <a:off x="2484120" y="4956048"/>
-            <a:ext cx="530352" cy="0"/>
+              <a:t>章节节奏</a:t>
+            </a:r>
+            <a:endParaRPr lang="en-US" sz="680" dirty="0"/>
+          </a:p>
+        </p:txBody>
+      </p:sp>
+      <p:sp>
+        <p:nvSpPr>
+          <p:cNvPr id="22" name="Shape 19"/>
+          <p:cNvSpPr/>
+          <p:nvPr/>
+        </p:nvSpPr>
+        <p:spPr>
+          <a:xfrm>
+            <a:off x="2395728" y="5212080"/>
+            <a:ext cx="512064" cy="0"/>
           </a:xfrm>
           <a:prstGeom prst="line">
             <a:avLst/>
           </a:prstGeom>
           <a:noFill/>
-          <a:ln w="25400">
+          <a:ln w="17780">
             <a:solidFill>
-              <a:srgbClr val="D72638">
-                <a:alpha val="78000"/>
+              <a:srgbClr val="111827">
+                <a:alpha val="84000"/>
               </a:srgbClr>
             </a:solidFill>
             <a:prstDash val="solid"/>
@@ -1497,14 +1605,14 @@
       </p:sp>
       <p:sp>
         <p:nvSpPr>
-          <p:cNvPr id="20" name="Text 18"/>
-          <p:cNvSpPr/>
-          <p:nvPr/>
-        </p:nvSpPr>
-        <p:spPr>
-          <a:xfrm>
-            <a:off x="2484120" y="5084064"/>
-            <a:ext cx="1496568" cy="329184"/>
+          <p:cNvPr id="23" name="Text 20"/>
+          <p:cNvSpPr/>
+          <p:nvPr/>
+        </p:nvSpPr>
+        <p:spPr>
+          <a:xfrm>
+            <a:off x="2395728" y="5266944"/>
+            <a:ext cx="1426464" cy="310896"/>
           </a:xfrm>
           <a:prstGeom prst="rect">
             <a:avLst/>
@@ -1524,11 +1632,11 @@
             <a:r>
               <a:rPr lang="en-US" sz="1800" b="1" dirty="0">
                 <a:solidFill>
-                  <a:srgbClr val="D72638"/>
+                  <a:srgbClr val="111827"/>
                 </a:solidFill>
-                <a:latin typeface="PingFang SC" pitchFamily="34" charset="0"/>
-                <a:ea typeface="PingFang SC" pitchFamily="34" charset="-122"/>
-                <a:cs typeface="PingFang SC" pitchFamily="34" charset="-120"/>
+                <a:latin typeface="Songti SC" pitchFamily="34" charset="0"/>
+                <a:ea typeface="Songti SC" pitchFamily="34" charset="-122"/>
+                <a:cs typeface="Songti SC" pitchFamily="34" charset="-120"/>
               </a:rPr>
               <a:t>5页</a:t>
             </a:r>
@@ -1538,14 +1646,14 @@
       </p:sp>
       <p:sp>
         <p:nvSpPr>
-          <p:cNvPr id="21" name="Text 19"/>
-          <p:cNvSpPr/>
-          <p:nvPr/>
-        </p:nvSpPr>
-        <p:spPr>
-          <a:xfrm>
-            <a:off x="2484120" y="5449824"/>
-            <a:ext cx="1496568" cy="228600"/>
+          <p:cNvPr id="24" name="Text 21"/>
+          <p:cNvSpPr/>
+          <p:nvPr/>
+        </p:nvSpPr>
+        <p:spPr>
+          <a:xfrm>
+            <a:off x="3968496" y="4974336"/>
+            <a:ext cx="1426464" cy="164592"/>
           </a:xfrm>
           <a:prstGeom prst="rect">
             <a:avLst/>
@@ -1563,39 +1671,39 @@
               <a:buNone/>
             </a:pPr>
             <a:r>
-              <a:rPr lang="en-US" sz="720" b="1" dirty="0">
+              <a:rPr lang="en-US" sz="680" b="1" dirty="0">
                 <a:solidFill>
-                  <a:srgbClr val="111827"/>
+                  <a:srgbClr val="5D6673"/>
                 </a:solidFill>
-                <a:latin typeface="PingFang SC" pitchFamily="34" charset="0"/>
-                <a:ea typeface="PingFang SC" pitchFamily="34" charset="-122"/>
-                <a:cs typeface="PingFang SC" pitchFamily="34" charset="-120"/>
+                <a:latin typeface="Avenir Next" pitchFamily="34" charset="0"/>
+                <a:ea typeface="Avenir Next" pitchFamily="34" charset="-122"/>
+                <a:cs typeface="Avenir Next" pitchFamily="34" charset="-120"/>
               </a:rPr>
-              <a:t>章节节奏</a:t>
-            </a:r>
-            <a:endParaRPr lang="en-US" sz="720" dirty="0"/>
-          </a:p>
-        </p:txBody>
-      </p:sp>
-      <p:sp>
-        <p:nvSpPr>
-          <p:cNvPr id="22" name="Shape 20"/>
-          <p:cNvSpPr/>
-          <p:nvPr/>
-        </p:nvSpPr>
-        <p:spPr>
-          <a:xfrm>
-            <a:off x="4145280" y="4956048"/>
-            <a:ext cx="530352" cy="0"/>
+              <a:t>证据结构</a:t>
+            </a:r>
+            <a:endParaRPr lang="en-US" sz="680" dirty="0"/>
+          </a:p>
+        </p:txBody>
+      </p:sp>
+      <p:sp>
+        <p:nvSpPr>
+          <p:cNvPr id="25" name="Shape 22"/>
+          <p:cNvSpPr/>
+          <p:nvPr/>
+        </p:nvSpPr>
+        <p:spPr>
+          <a:xfrm>
+            <a:off x="3968496" y="5212080"/>
+            <a:ext cx="512064" cy="0"/>
           </a:xfrm>
           <a:prstGeom prst="line">
             <a:avLst/>
           </a:prstGeom>
           <a:noFill/>
-          <a:ln w="25400">
+          <a:ln w="17780">
             <a:solidFill>
               <a:srgbClr val="111827">
-                <a:alpha val="78000"/>
+                <a:alpha val="84000"/>
               </a:srgbClr>
             </a:solidFill>
             <a:prstDash val="solid"/>
@@ -1604,14 +1712,14 @@
       </p:sp>
       <p:sp>
         <p:nvSpPr>
-          <p:cNvPr id="23" name="Text 21"/>
-          <p:cNvSpPr/>
-          <p:nvPr/>
-        </p:nvSpPr>
-        <p:spPr>
-          <a:xfrm>
-            <a:off x="4145280" y="5084064"/>
-            <a:ext cx="1496568" cy="329184"/>
+          <p:cNvPr id="26" name="Text 23"/>
+          <p:cNvSpPr/>
+          <p:nvPr/>
+        </p:nvSpPr>
+        <p:spPr>
+          <a:xfrm>
+            <a:off x="3968496" y="5266944"/>
+            <a:ext cx="1426464" cy="310896"/>
           </a:xfrm>
           <a:prstGeom prst="rect">
             <a:avLst/>
@@ -1633,9 +1741,9 @@
                 <a:solidFill>
                   <a:srgbClr val="111827"/>
                 </a:solidFill>
-                <a:latin typeface="PingFang SC" pitchFamily="34" charset="0"/>
-                <a:ea typeface="PingFang SC" pitchFamily="34" charset="-122"/>
-                <a:cs typeface="PingFang SC" pitchFamily="34" charset="-120"/>
+                <a:latin typeface="Songti SC" pitchFamily="34" charset="0"/>
+                <a:ea typeface="Songti SC" pitchFamily="34" charset="-122"/>
+                <a:cs typeface="Songti SC" pitchFamily="34" charset="-120"/>
               </a:rPr>
               <a:t>3层</a:t>
             </a:r>
@@ -1645,55 +1753,14 @@
       </p:sp>
       <p:sp>
         <p:nvSpPr>
-          <p:cNvPr id="24" name="Text 22"/>
-          <p:cNvSpPr/>
-          <p:nvPr/>
-        </p:nvSpPr>
-        <p:spPr>
-          <a:xfrm>
-            <a:off x="4145280" y="5449824"/>
-            <a:ext cx="1496568" cy="228600"/>
-          </a:xfrm>
-          <a:prstGeom prst="rect">
-            <a:avLst/>
-          </a:prstGeom>
-          <a:noFill/>
-          <a:ln/>
-        </p:spPr>
-        <p:txBody>
-          <a:bodyPr wrap="square" lIns="0" tIns="0" rIns="0" bIns="0" rtlCol="0" anchor="ctr">
-            <a:normAutofit/>
-          </a:bodyPr>
-          <a:lstStyle/>
-          <a:p>
-            <a:pPr algn="l" indent="0" marL="0">
-              <a:buNone/>
-            </a:pPr>
-            <a:r>
-              <a:rPr lang="en-US" sz="720" b="1" dirty="0">
-                <a:solidFill>
-                  <a:srgbClr val="111827"/>
-                </a:solidFill>
-                <a:latin typeface="PingFang SC" pitchFamily="34" charset="0"/>
-                <a:ea typeface="PingFang SC" pitchFamily="34" charset="-122"/>
-                <a:cs typeface="PingFang SC" pitchFamily="34" charset="-120"/>
-              </a:rPr>
-              <a:t>证据结构</a:t>
-            </a:r>
-            <a:endParaRPr lang="en-US" sz="720" dirty="0"/>
-          </a:p>
-        </p:txBody>
-      </p:sp>
-      <p:sp>
-        <p:nvSpPr>
-          <p:cNvPr id="25" name="Text 23"/>
-          <p:cNvSpPr/>
-          <p:nvPr/>
-        </p:nvSpPr>
-        <p:spPr>
-          <a:xfrm>
-            <a:off x="6793992" y="1554480"/>
-            <a:ext cx="2011680" cy="237744"/>
+          <p:cNvPr id="27" name="Text 24"/>
+          <p:cNvSpPr/>
+          <p:nvPr/>
+        </p:nvSpPr>
+        <p:spPr>
+          <a:xfrm>
+            <a:off x="6629400" y="1719072"/>
+            <a:ext cx="2377440" cy="237744"/>
           </a:xfrm>
           <a:prstGeom prst="rect">
             <a:avLst/>
@@ -1719,7 +1786,7 @@
                 <a:ea typeface="PingFang SC" pitchFamily="34" charset="-122"/>
                 <a:cs typeface="PingFang SC" pitchFamily="34" charset="-120"/>
               </a:rPr>
-              <a:t>趋势指数</a:t>
+              <a:t>证据走向</a:t>
             </a:r>
             <a:endParaRPr lang="en-US" sz="1320" dirty="0"/>
           </a:p>
@@ -1727,14 +1794,14 @@
       </p:sp>
       <p:sp>
         <p:nvSpPr>
-          <p:cNvPr id="26" name="Shape 24"/>
-          <p:cNvSpPr/>
-          <p:nvPr/>
-        </p:nvSpPr>
-        <p:spPr>
-          <a:xfrm>
-            <a:off x="6793992" y="1938528"/>
-            <a:ext cx="3886200" cy="0"/>
+          <p:cNvPr id="28" name="Shape 25"/>
+          <p:cNvSpPr/>
+          <p:nvPr/>
+        </p:nvSpPr>
+        <p:spPr>
+          <a:xfrm>
+            <a:off x="6437376" y="1883664"/>
+            <a:ext cx="3730752" cy="0"/>
           </a:xfrm>
           <a:prstGeom prst="line">
             <a:avLst/>
@@ -1752,14 +1819,14 @@
       </p:sp>
       <p:sp>
         <p:nvSpPr>
-          <p:cNvPr id="27" name="Shape 25"/>
-          <p:cNvSpPr/>
-          <p:nvPr/>
-        </p:nvSpPr>
-        <p:spPr>
-          <a:xfrm>
-            <a:off x="6720840" y="4718304"/>
-            <a:ext cx="3886200" cy="0"/>
+          <p:cNvPr id="29" name="Shape 26"/>
+          <p:cNvSpPr/>
+          <p:nvPr/>
+        </p:nvSpPr>
+        <p:spPr>
+          <a:xfrm>
+            <a:off x="6437376" y="4846320"/>
+            <a:ext cx="3730752" cy="0"/>
           </a:xfrm>
           <a:prstGeom prst="line">
             <a:avLst/>
@@ -1777,14 +1844,14 @@
       </p:sp>
       <p:sp>
         <p:nvSpPr>
-          <p:cNvPr id="28" name="Shape 26"/>
-          <p:cNvSpPr/>
-          <p:nvPr/>
-        </p:nvSpPr>
-        <p:spPr>
-          <a:xfrm>
-            <a:off x="6922008" y="3704417"/>
-            <a:ext cx="720090" cy="1013887"/>
+          <p:cNvPr id="30" name="Shape 27"/>
+          <p:cNvSpPr/>
+          <p:nvPr/>
+        </p:nvSpPr>
+        <p:spPr>
+          <a:xfrm>
+            <a:off x="6638544" y="4183563"/>
+            <a:ext cx="681228" cy="662757"/>
           </a:xfrm>
           <a:prstGeom prst="rect">
             <a:avLst/>
@@ -1804,14 +1871,14 @@
       </p:sp>
       <p:sp>
         <p:nvSpPr>
-          <p:cNvPr id="29" name="Text 27"/>
-          <p:cNvSpPr/>
-          <p:nvPr/>
-        </p:nvSpPr>
-        <p:spPr>
-          <a:xfrm>
-            <a:off x="6885432" y="4846320"/>
-            <a:ext cx="793242" cy="164592"/>
+          <p:cNvPr id="31" name="Text 28"/>
+          <p:cNvSpPr/>
+          <p:nvPr/>
+        </p:nvSpPr>
+        <p:spPr>
+          <a:xfrm>
+            <a:off x="6601968" y="4974336"/>
+            <a:ext cx="754380" cy="164592"/>
           </a:xfrm>
           <a:prstGeom prst="rect">
             <a:avLst/>
@@ -1845,14 +1912,14 @@
       </p:sp>
       <p:sp>
         <p:nvSpPr>
-          <p:cNvPr id="30" name="Shape 28"/>
-          <p:cNvSpPr/>
-          <p:nvPr/>
-        </p:nvSpPr>
-        <p:spPr>
-          <a:xfrm>
-            <a:off x="7843266" y="3173334"/>
-            <a:ext cx="720090" cy="1544970"/>
+          <p:cNvPr id="32" name="Shape 29"/>
+          <p:cNvSpPr/>
+          <p:nvPr/>
+        </p:nvSpPr>
+        <p:spPr>
+          <a:xfrm>
+            <a:off x="7520940" y="3576036"/>
+            <a:ext cx="681228" cy="1270284"/>
           </a:xfrm>
           <a:prstGeom prst="rect">
             <a:avLst/>
@@ -1872,14 +1939,14 @@
       </p:sp>
       <p:sp>
         <p:nvSpPr>
-          <p:cNvPr id="31" name="Text 29"/>
-          <p:cNvSpPr/>
-          <p:nvPr/>
-        </p:nvSpPr>
-        <p:spPr>
-          <a:xfrm>
-            <a:off x="7806690" y="4846320"/>
-            <a:ext cx="793242" cy="164592"/>
+          <p:cNvPr id="33" name="Text 30"/>
+          <p:cNvSpPr/>
+          <p:nvPr/>
+        </p:nvSpPr>
+        <p:spPr>
+          <a:xfrm>
+            <a:off x="7484364" y="4974336"/>
+            <a:ext cx="754380" cy="164592"/>
           </a:xfrm>
           <a:prstGeom prst="rect">
             <a:avLst/>
@@ -1913,14 +1980,14 @@
       </p:sp>
       <p:sp>
         <p:nvSpPr>
-          <p:cNvPr id="32" name="Shape 30"/>
-          <p:cNvSpPr/>
-          <p:nvPr/>
-        </p:nvSpPr>
-        <p:spPr>
-          <a:xfrm>
-            <a:off x="8764524" y="2835372"/>
-            <a:ext cx="720090" cy="1882932"/>
+          <p:cNvPr id="34" name="Shape 31"/>
+          <p:cNvSpPr/>
+          <p:nvPr/>
+        </p:nvSpPr>
+        <p:spPr>
+          <a:xfrm>
+            <a:off x="8403336" y="2996123"/>
+            <a:ext cx="681228" cy="1850197"/>
           </a:xfrm>
           <a:prstGeom prst="rect">
             <a:avLst/>
@@ -1940,14 +2007,39 @@
       </p:sp>
       <p:sp>
         <p:nvSpPr>
-          <p:cNvPr id="33" name="Text 31"/>
-          <p:cNvSpPr/>
-          <p:nvPr/>
-        </p:nvSpPr>
-        <p:spPr>
-          <a:xfrm>
-            <a:off x="8727948" y="4846320"/>
-            <a:ext cx="793242" cy="164592"/>
+          <p:cNvPr id="35" name="Shape 32"/>
+          <p:cNvSpPr/>
+          <p:nvPr/>
+        </p:nvSpPr>
+        <p:spPr>
+          <a:xfrm>
+            <a:off x="8348472" y="2868107"/>
+            <a:ext cx="790956" cy="0"/>
+          </a:xfrm>
+          <a:prstGeom prst="line">
+            <a:avLst/>
+          </a:prstGeom>
+          <a:noFill/>
+          <a:ln w="12700">
+            <a:solidFill>
+              <a:srgbClr val="111827">
+                <a:alpha val="90000"/>
+              </a:srgbClr>
+            </a:solidFill>
+            <a:prstDash val="solid"/>
+          </a:ln>
+        </p:spPr>
+      </p:sp>
+      <p:sp>
+        <p:nvSpPr>
+          <p:cNvPr id="36" name="Text 33"/>
+          <p:cNvSpPr/>
+          <p:nvPr/>
+        </p:nvSpPr>
+        <p:spPr>
+          <a:xfrm>
+            <a:off x="8366760" y="4974336"/>
+            <a:ext cx="754380" cy="164592"/>
           </a:xfrm>
           <a:prstGeom prst="rect">
             <a:avLst/>
@@ -1981,14 +2073,14 @@
       </p:sp>
       <p:sp>
         <p:nvSpPr>
-          <p:cNvPr id="34" name="Shape 32"/>
-          <p:cNvSpPr/>
-          <p:nvPr/>
-        </p:nvSpPr>
-        <p:spPr>
-          <a:xfrm>
-            <a:off x="9685782" y="2521549"/>
-            <a:ext cx="720090" cy="2196755"/>
+          <p:cNvPr id="37" name="Shape 34"/>
+          <p:cNvSpPr/>
+          <p:nvPr/>
+        </p:nvSpPr>
+        <p:spPr>
+          <a:xfrm>
+            <a:off x="9285732" y="2554285"/>
+            <a:ext cx="681228" cy="2292035"/>
           </a:xfrm>
           <a:prstGeom prst="rect">
             <a:avLst/>
@@ -2008,14 +2100,14 @@
       </p:sp>
       <p:sp>
         <p:nvSpPr>
-          <p:cNvPr id="35" name="Text 33"/>
-          <p:cNvSpPr/>
-          <p:nvPr/>
-        </p:nvSpPr>
-        <p:spPr>
-          <a:xfrm>
-            <a:off x="9649206" y="4846320"/>
-            <a:ext cx="793242" cy="164592"/>
+          <p:cNvPr id="38" name="Text 35"/>
+          <p:cNvSpPr/>
+          <p:nvPr/>
+        </p:nvSpPr>
+        <p:spPr>
+          <a:xfrm>
+            <a:off x="9249156" y="4974336"/>
+            <a:ext cx="754380" cy="164592"/>
           </a:xfrm>
           <a:prstGeom prst="rect">
             <a:avLst/>
@@ -2044,6 +2136,113 @@
               <a:t>行动</a:t>
             </a:r>
             <a:endParaRPr lang="en-US" sz="680" dirty="0"/>
+          </a:p>
+        </p:txBody>
+      </p:sp>
+      <p:sp>
+        <p:nvSpPr>
+          <p:cNvPr id="39" name="Shape 36"/>
+          <p:cNvSpPr/>
+          <p:nvPr/>
+        </p:nvSpPr>
+        <p:spPr>
+          <a:xfrm>
+            <a:off x="8101584" y="6254496"/>
+            <a:ext cx="475488" cy="0"/>
+          </a:xfrm>
+          <a:prstGeom prst="line">
+            <a:avLst/>
+          </a:prstGeom>
+          <a:noFill/>
+          <a:ln w="19050">
+            <a:solidFill>
+              <a:srgbClr val="111827">
+                <a:alpha val="90000"/>
+              </a:srgbClr>
+            </a:solidFill>
+            <a:prstDash val="solid"/>
+          </a:ln>
+        </p:spPr>
+      </p:sp>
+      <p:sp>
+        <p:nvSpPr>
+          <p:cNvPr id="40" name="Text 37"/>
+          <p:cNvSpPr/>
+          <p:nvPr/>
+        </p:nvSpPr>
+        <p:spPr>
+          <a:xfrm>
+            <a:off x="8723376" y="6163056"/>
+            <a:ext cx="2560320" cy="164592"/>
+          </a:xfrm>
+          <a:prstGeom prst="rect">
+            <a:avLst/>
+          </a:prstGeom>
+          <a:noFill/>
+          <a:ln/>
+        </p:spPr>
+        <p:txBody>
+          <a:bodyPr wrap="square" lIns="0" tIns="0" rIns="0" bIns="0" rtlCol="0" anchor="ctr">
+            <a:normAutofit/>
+          </a:bodyPr>
+          <a:lstStyle/>
+          <a:p>
+            <a:pPr algn="l" indent="0" marL="0">
+              <a:buNone/>
+            </a:pPr>
+            <a:r>
+              <a:rPr lang="en-US" sz="740" dirty="0">
+                <a:solidFill>
+                  <a:srgbClr val="5D6673"/>
+                </a:solidFill>
+                <a:latin typeface="PingFang SC" pitchFamily="34" charset="0"/>
+                <a:ea typeface="PingFang SC" pitchFamily="34" charset="-122"/>
+                <a:cs typeface="PingFang SC" pitchFamily="34" charset="-120"/>
+              </a:rPr>
+              <a:t>文字、数字和图表标签均为 PPT 可编辑对象</a:t>
+            </a:r>
+            <a:endParaRPr lang="en-US" sz="740" dirty="0"/>
+          </a:p>
+        </p:txBody>
+      </p:sp>
+      <p:sp>
+        <p:nvSpPr>
+          <p:cNvPr id="41" name="Text 38"/>
+          <p:cNvSpPr/>
+          <p:nvPr/>
+        </p:nvSpPr>
+        <p:spPr>
+          <a:xfrm>
+            <a:off x="9875520" y="6291072"/>
+            <a:ext cx="914400" cy="146304"/>
+          </a:xfrm>
+          <a:prstGeom prst="rect">
+            <a:avLst/>
+          </a:prstGeom>
+          <a:noFill/>
+          <a:ln/>
+        </p:spPr>
+        <p:txBody>
+          <a:bodyPr wrap="square" lIns="0" tIns="0" rIns="0" bIns="0" rtlCol="0" anchor="ctr">
+            <a:normAutofit/>
+          </a:bodyPr>
+          <a:lstStyle/>
+          <a:p>
+            <a:pPr algn="r" indent="0" marL="0">
+              <a:buNone/>
+            </a:pPr>
+            <a:r>
+              <a:rPr lang="en-US" sz="720" b="1" dirty="0">
+                <a:solidFill>
+                  <a:srgbClr val="111827"/>
+                </a:solidFill>
+                <a:latin typeface="Avenir Next" pitchFamily="34" charset="0"/>
+                <a:ea typeface="Avenir Next" pitchFamily="34" charset="-122"/>
+                <a:cs typeface="Avenir Next" pitchFamily="34" charset="-120"/>
+              </a:rPr>
+              <a:t>编辑杂志</a:t>
+            </a:r>
+            <a:endParaRPr lang="en-US" sz="720" dirty="0"/>
           </a:p>
         </p:txBody>
       </p:sp>
